--- a/trabalho final/Apresentação Francisco Davi rev0.pptx
+++ b/trabalho final/Apresentação Francisco Davi rev0.pptx
@@ -621,7 +621,7 @@
           <a:p>
             <a:fld id="{C16A5930-CAD2-4434-B68E-14C069792D9C}" type="datetimeFigureOut">
               <a:rPr lang="en-US" smtClean="0"/>
-              <a:t>11/28/2025</a:t>
+              <a:t>12/1/2025</a:t>
             </a:fld>
             <a:endParaRPr lang="en-US"/>
           </a:p>
@@ -5232,8 +5232,8 @@
         </p:blipFill>
         <p:spPr>
           <a:xfrm>
-            <a:off x="657165" y="1504481"/>
-            <a:ext cx="2829320" cy="981212"/>
+            <a:off x="694945" y="1404026"/>
+            <a:ext cx="2389205" cy="828580"/>
           </a:xfrm>
           <a:prstGeom prst="rect">
             <a:avLst/>
@@ -5262,8 +5262,8 @@
         </p:blipFill>
         <p:spPr>
           <a:xfrm>
-            <a:off x="696921" y="2366425"/>
-            <a:ext cx="4201111" cy="2753109"/>
+            <a:off x="709575" y="2127175"/>
+            <a:ext cx="3544718" cy="2322956"/>
           </a:xfrm>
           <a:prstGeom prst="rect">
             <a:avLst/>
@@ -5506,8 +5506,8 @@
         </p:blipFill>
         <p:spPr>
           <a:xfrm>
-            <a:off x="684028" y="1273041"/>
-            <a:ext cx="6592220" cy="1905266"/>
+            <a:off x="833932" y="1346193"/>
+            <a:ext cx="5981458" cy="1728745"/>
           </a:xfrm>
           <a:prstGeom prst="rect">
             <a:avLst/>
@@ -5536,8 +5536,8 @@
         </p:blipFill>
         <p:spPr>
           <a:xfrm>
-            <a:off x="684028" y="3311611"/>
-            <a:ext cx="6325483" cy="1724266"/>
+            <a:off x="731520" y="3128727"/>
+            <a:ext cx="5795188" cy="1579713"/>
           </a:xfrm>
           <a:prstGeom prst="rect">
             <a:avLst/>
@@ -7426,8 +7426,8 @@
         </p:blipFill>
         <p:spPr>
           <a:xfrm>
-            <a:off x="504000" y="1580774"/>
-            <a:ext cx="8705630" cy="2758470"/>
+            <a:off x="651052" y="1538267"/>
+            <a:ext cx="6554213" cy="2076771"/>
           </a:xfrm>
           <a:prstGeom prst="rect">
             <a:avLst/>
@@ -8241,7 +8241,7 @@
                 <a:latin typeface="Arial"/>
                 <a:ea typeface="Microsoft YaHei"/>
               </a:rPr>
-              <a:t> para ser </a:t>
+              <a:t> </a:t>
             </a:r>
             <a:r>
               <a:rPr lang="en-US" dirty="0" err="1">
@@ -8251,7 +8251,47 @@
                 <a:latin typeface="Arial"/>
                 <a:ea typeface="Microsoft YaHei"/>
               </a:rPr>
-              <a:t>transformado</a:t>
+              <a:t>que</a:t>
+            </a:r>
+            <a:r>
+              <a:rPr lang="en-US" dirty="0">
+                <a:solidFill>
+                  <a:srgbClr val="000000"/>
+                </a:solidFill>
+                <a:latin typeface="Arial"/>
+                <a:ea typeface="Microsoft YaHei"/>
+              </a:rPr>
+              <a:t> </a:t>
+            </a:r>
+            <a:r>
+              <a:rPr lang="en-US" dirty="0" err="1">
+                <a:solidFill>
+                  <a:srgbClr val="000000"/>
+                </a:solidFill>
+                <a:latin typeface="Arial"/>
+                <a:ea typeface="Microsoft YaHei"/>
+              </a:rPr>
+              <a:t>possa</a:t>
+            </a:r>
+            <a:r>
+              <a:rPr lang="en-US" dirty="0">
+                <a:solidFill>
+                  <a:srgbClr val="000000"/>
+                </a:solidFill>
+                <a:latin typeface="Arial"/>
+                <a:ea typeface="Microsoft YaHei"/>
+              </a:rPr>
+              <a:t> ser </a:t>
+            </a:r>
+            <a:r>
+              <a:rPr lang="en-US" dirty="0" err="1">
+                <a:solidFill>
+                  <a:srgbClr val="000000"/>
+                </a:solidFill>
+                <a:latin typeface="Arial"/>
+                <a:ea typeface="Microsoft YaHei"/>
+              </a:rPr>
+              <a:t>convertido</a:t>
             </a:r>
             <a:r>
               <a:rPr lang="en-US" dirty="0">
@@ -11794,7 +11834,7 @@
         <p:spPr>
           <a:xfrm>
             <a:off x="564840" y="1002599"/>
-            <a:ext cx="8433000" cy="3486273"/>
+            <a:ext cx="8433000" cy="4161932"/>
           </a:xfrm>
           <a:prstGeom prst="rect">
             <a:avLst/>
@@ -11856,7 +11896,7 @@
                 <a:latin typeface="Arial"/>
                 <a:ea typeface="Microsoft YaHei"/>
               </a:rPr>
-              <a:t>Identificação</a:t>
+              <a:t>Excelente</a:t>
             </a:r>
             <a:r>
               <a:rPr lang="en-US" sz="1800" b="0" u="none" strike="noStrike" dirty="0">
@@ -11867,7 +11907,7 @@
                 <a:latin typeface="Arial"/>
                 <a:ea typeface="Microsoft YaHei"/>
               </a:rPr>
-              <a:t> de 2 regimes </a:t>
+              <a:t> </a:t>
             </a:r>
             <a:r>
               <a:rPr lang="en-US" sz="1800" b="0" u="none" strike="noStrike" dirty="0" err="1">
@@ -11878,7 +11918,7 @@
                 <a:latin typeface="Arial"/>
                 <a:ea typeface="Microsoft YaHei"/>
               </a:rPr>
-              <a:t>operacionais</a:t>
+              <a:t>seletividade</a:t>
             </a:r>
             <a:r>
               <a:rPr lang="en-US" sz="1800" b="0" u="none" strike="noStrike" dirty="0">
@@ -11889,6 +11929,50 @@
                 <a:latin typeface="Arial"/>
                 <a:ea typeface="Microsoft YaHei"/>
               </a:rPr>
+              <a:t> de </a:t>
+            </a:r>
+            <a:r>
+              <a:rPr lang="en-US" sz="1800" b="0" u="none" strike="noStrike" dirty="0" err="1">
+                <a:solidFill>
+                  <a:srgbClr val="000000"/>
+                </a:solidFill>
+                <a:uFillTx/>
+                <a:latin typeface="Arial"/>
+                <a:ea typeface="Microsoft YaHei"/>
+              </a:rPr>
+              <a:t>remoção</a:t>
+            </a:r>
+            <a:r>
+              <a:rPr lang="en-US" sz="1800" b="0" u="none" strike="noStrike" dirty="0">
+                <a:solidFill>
+                  <a:srgbClr val="000000"/>
+                </a:solidFill>
+                <a:uFillTx/>
+                <a:latin typeface="Arial"/>
+                <a:ea typeface="Microsoft YaHei"/>
+              </a:rPr>
+              <a:t> de H2S – </a:t>
+            </a:r>
+            <a:r>
+              <a:rPr lang="en-US" sz="1800" b="0" u="none" strike="noStrike" dirty="0" err="1">
+                <a:solidFill>
+                  <a:srgbClr val="000000"/>
+                </a:solidFill>
+                <a:uFillTx/>
+                <a:latin typeface="Arial"/>
+                <a:ea typeface="Microsoft YaHei"/>
+              </a:rPr>
+              <a:t>Projeto</a:t>
+            </a:r>
+            <a:r>
+              <a:rPr lang="en-US" sz="1800" b="0" u="none" strike="noStrike" dirty="0">
+                <a:solidFill>
+                  <a:srgbClr val="000000"/>
+                </a:solidFill>
+                <a:uFillTx/>
+                <a:latin typeface="Arial"/>
+                <a:ea typeface="Microsoft YaHei"/>
+              </a:rPr>
               <a:t> </a:t>
             </a:r>
             <a:r>
@@ -11900,22 +11984,22 @@
                 <a:latin typeface="Arial"/>
                 <a:ea typeface="Microsoft YaHei"/>
               </a:rPr>
-              <a:t>distintos</a:t>
-            </a:r>
-            <a:r>
-              <a:rPr lang="en-US" sz="1800" b="0" u="none" strike="noStrike" dirty="0">
-                <a:solidFill>
-                  <a:srgbClr val="000000"/>
-                </a:solidFill>
-                <a:uFillTx/>
-                <a:latin typeface="Arial"/>
-                <a:ea typeface="Microsoft YaHei"/>
-              </a:rPr>
-              <a:t>:</a:t>
-            </a:r>
-          </a:p>
-          <a:p>
-            <a:pPr marL="673200" lvl="1" indent="-216000">
+              <a:t>validado</a:t>
+            </a:r>
+            <a:endParaRPr lang="en-US" sz="1800" b="0" u="none" strike="noStrike" dirty="0">
+              <a:solidFill>
+                <a:srgbClr val="000000"/>
+              </a:solidFill>
+              <a:uFillTx/>
+              <a:latin typeface="Arial"/>
+              <a:ea typeface="Microsoft YaHei"/>
+            </a:endParaRPr>
+          </a:p>
+          <a:p>
+            <a:pPr marL="216000" indent="-216000">
+              <a:lnSpc>
+                <a:spcPct val="100000"/>
+              </a:lnSpc>
               <a:buClr>
                 <a:srgbClr val="000000"/>
               </a:buClr>
@@ -11923,99 +12007,20 @@
               <a:buFont typeface="Wingdings" charset="2"/>
               <a:buChar char=""/>
             </a:pPr>
-            <a:r>
-              <a:rPr lang="en-US" b="0" u="none" strike="noStrike" dirty="0">
-                <a:solidFill>
-                  <a:srgbClr val="000000"/>
-                </a:solidFill>
-                <a:uFillTx/>
-                <a:latin typeface="Arial"/>
-              </a:rPr>
-              <a:t>Alta </a:t>
-            </a:r>
-            <a:r>
-              <a:rPr lang="en-US" b="0" u="none" strike="noStrike" dirty="0" err="1">
-                <a:solidFill>
-                  <a:srgbClr val="000000"/>
-                </a:solidFill>
-                <a:uFillTx/>
-                <a:latin typeface="Arial"/>
-              </a:rPr>
-              <a:t>sensibilidade</a:t>
-            </a:r>
-            <a:r>
-              <a:rPr lang="en-US" b="0" u="none" strike="noStrike" dirty="0">
-                <a:solidFill>
-                  <a:srgbClr val="000000"/>
-                </a:solidFill>
-                <a:uFillTx/>
-                <a:latin typeface="Arial"/>
-              </a:rPr>
-              <a:t> </a:t>
-            </a:r>
-            <a:r>
-              <a:rPr lang="en-US" b="0" u="none" strike="noStrike" dirty="0" err="1">
-                <a:solidFill>
-                  <a:srgbClr val="000000"/>
-                </a:solidFill>
-                <a:uFillTx/>
-                <a:latin typeface="Arial"/>
-              </a:rPr>
-              <a:t>térmica</a:t>
-            </a:r>
-            <a:r>
-              <a:rPr lang="en-US" b="0" u="none" strike="noStrike" dirty="0">
-                <a:solidFill>
-                  <a:srgbClr val="000000"/>
-                </a:solidFill>
-                <a:uFillTx/>
-                <a:latin typeface="Arial"/>
-              </a:rPr>
-              <a:t> – </a:t>
-            </a:r>
-            <a:r>
-              <a:rPr lang="en-US" b="0" u="none" strike="noStrike" dirty="0" err="1">
-                <a:solidFill>
-                  <a:srgbClr val="000000"/>
-                </a:solidFill>
-                <a:uFillTx/>
-                <a:latin typeface="Arial"/>
-              </a:rPr>
-              <a:t>aumento</a:t>
-            </a:r>
-            <a:r>
-              <a:rPr lang="en-US" b="0" u="none" strike="noStrike" dirty="0">
-                <a:solidFill>
-                  <a:srgbClr val="000000"/>
-                </a:solidFill>
-                <a:uFillTx/>
-                <a:latin typeface="Arial"/>
-              </a:rPr>
-              <a:t> </a:t>
-            </a:r>
-            <a:r>
-              <a:rPr lang="en-US" b="0" u="none" strike="noStrike" dirty="0" err="1">
-                <a:solidFill>
-                  <a:srgbClr val="000000"/>
-                </a:solidFill>
-                <a:uFillTx/>
-                <a:latin typeface="Arial"/>
-              </a:rPr>
-              <a:t>recuperação</a:t>
-            </a:r>
-            <a:r>
-              <a:rPr lang="en-US" b="0" u="none" strike="noStrike" dirty="0">
-                <a:solidFill>
-                  <a:srgbClr val="000000"/>
-                </a:solidFill>
-                <a:uFillTx/>
-                <a:latin typeface="Arial"/>
-              </a:rPr>
-              <a:t> de H2S</a:t>
-            </a:r>
-          </a:p>
-          <a:p>
-            <a:pPr marL="673200" lvl="1" indent="-216000">
+            <a:endParaRPr lang="en-US" sz="1800" b="0" u="none" strike="noStrike" dirty="0">
+              <a:solidFill>
+                <a:srgbClr val="000000"/>
+              </a:solidFill>
+              <a:uFillTx/>
+              <a:latin typeface="Arial"/>
+              <a:ea typeface="Microsoft YaHei"/>
+            </a:endParaRPr>
+          </a:p>
+          <a:p>
+            <a:pPr marL="216000" indent="-216000">
+              <a:lnSpc>
+                <a:spcPct val="100000"/>
+              </a:lnSpc>
               <a:buClr>
                 <a:srgbClr val="000000"/>
               </a:buClr>
@@ -12024,89 +12029,74 @@
               <a:buChar char=""/>
             </a:pPr>
             <a:r>
-              <a:rPr lang="en-US" dirty="0">
-                <a:solidFill>
-                  <a:srgbClr val="000000"/>
-                </a:solidFill>
-                <a:latin typeface="Arial"/>
-              </a:rPr>
-              <a:t>Baixa </a:t>
-            </a:r>
-            <a:r>
-              <a:rPr lang="en-US" dirty="0" err="1">
-                <a:solidFill>
-                  <a:srgbClr val="000000"/>
-                </a:solidFill>
-                <a:latin typeface="Arial"/>
-              </a:rPr>
-              <a:t>sensibilidade</a:t>
-            </a:r>
-            <a:r>
-              <a:rPr lang="en-US" dirty="0">
-                <a:solidFill>
-                  <a:srgbClr val="000000"/>
-                </a:solidFill>
-                <a:latin typeface="Arial"/>
+              <a:rPr lang="en-US" sz="1800" b="0" u="none" strike="noStrike" dirty="0" err="1">
+                <a:solidFill>
+                  <a:srgbClr val="000000"/>
+                </a:solidFill>
+                <a:uFillTx/>
+                <a:latin typeface="Arial"/>
+                <a:ea typeface="Microsoft YaHei"/>
+              </a:rPr>
+              <a:t>Identificação</a:t>
+            </a:r>
+            <a:r>
+              <a:rPr lang="en-US" sz="1800" b="0" u="none" strike="noStrike" dirty="0">
+                <a:solidFill>
+                  <a:srgbClr val="000000"/>
+                </a:solidFill>
+                <a:uFillTx/>
+                <a:latin typeface="Arial"/>
+                <a:ea typeface="Microsoft YaHei"/>
+              </a:rPr>
+              <a:t> de 2 regimes </a:t>
+            </a:r>
+            <a:r>
+              <a:rPr lang="en-US" sz="1800" b="0" u="none" strike="noStrike" dirty="0" err="1">
+                <a:solidFill>
+                  <a:srgbClr val="000000"/>
+                </a:solidFill>
+                <a:uFillTx/>
+                <a:latin typeface="Arial"/>
+                <a:ea typeface="Microsoft YaHei"/>
+              </a:rPr>
+              <a:t>operacionais</a:t>
+            </a:r>
+            <a:r>
+              <a:rPr lang="en-US" sz="1800" b="0" u="none" strike="noStrike" dirty="0">
+                <a:solidFill>
+                  <a:srgbClr val="000000"/>
+                </a:solidFill>
+                <a:uFillTx/>
+                <a:latin typeface="Arial"/>
+                <a:ea typeface="Microsoft YaHei"/>
               </a:rPr>
               <a:t> </a:t>
             </a:r>
             <a:r>
-              <a:rPr lang="en-US" dirty="0" err="1">
-                <a:solidFill>
-                  <a:srgbClr val="000000"/>
-                </a:solidFill>
-                <a:latin typeface="Arial"/>
-              </a:rPr>
-              <a:t>térmica</a:t>
-            </a:r>
-            <a:r>
-              <a:rPr lang="en-US" dirty="0">
-                <a:solidFill>
-                  <a:srgbClr val="000000"/>
-                </a:solidFill>
-                <a:latin typeface="Arial"/>
-              </a:rPr>
-              <a:t> – </a:t>
-            </a:r>
-            <a:r>
-              <a:rPr lang="en-US" dirty="0" err="1">
-                <a:solidFill>
-                  <a:srgbClr val="000000"/>
-                </a:solidFill>
-                <a:latin typeface="Arial"/>
-              </a:rPr>
-              <a:t>após</a:t>
-            </a:r>
-            <a:r>
-              <a:rPr lang="en-US" dirty="0">
-                <a:solidFill>
-                  <a:srgbClr val="000000"/>
-                </a:solidFill>
-                <a:latin typeface="Arial"/>
-              </a:rPr>
-              <a:t> </a:t>
-            </a:r>
-            <a:r>
-              <a:rPr lang="en-US" dirty="0" err="1">
-                <a:solidFill>
-                  <a:srgbClr val="000000"/>
-                </a:solidFill>
-                <a:latin typeface="Arial"/>
-              </a:rPr>
-              <a:t>recuperação</a:t>
-            </a:r>
-            <a:r>
-              <a:rPr lang="en-US" dirty="0">
-                <a:solidFill>
-                  <a:srgbClr val="000000"/>
-                </a:solidFill>
-                <a:latin typeface="Arial"/>
-              </a:rPr>
-              <a:t> completa de H2S</a:t>
-            </a:r>
-          </a:p>
-          <a:p>
-            <a:pPr marL="216000" indent="-216000">
+              <a:rPr lang="en-US" sz="1800" b="0" u="none" strike="noStrike" dirty="0" err="1">
+                <a:solidFill>
+                  <a:srgbClr val="000000"/>
+                </a:solidFill>
+                <a:uFillTx/>
+                <a:latin typeface="Arial"/>
+                <a:ea typeface="Microsoft YaHei"/>
+              </a:rPr>
+              <a:t>distintos</a:t>
+            </a:r>
+            <a:r>
+              <a:rPr lang="en-US" sz="1800" b="0" u="none" strike="noStrike" dirty="0">
+                <a:solidFill>
+                  <a:srgbClr val="000000"/>
+                </a:solidFill>
+                <a:uFillTx/>
+                <a:latin typeface="Arial"/>
+                <a:ea typeface="Microsoft YaHei"/>
+              </a:rPr>
+              <a:t>:</a:t>
+            </a:r>
+          </a:p>
+          <a:p>
+            <a:pPr marL="673200" lvl="1" indent="-216000">
               <a:buClr>
                 <a:srgbClr val="000000"/>
               </a:buClr>
@@ -12114,6 +12104,197 @@
               <a:buFont typeface="Wingdings" charset="2"/>
               <a:buChar char=""/>
             </a:pPr>
+            <a:r>
+              <a:rPr lang="en-US" b="0" u="none" strike="noStrike" dirty="0">
+                <a:solidFill>
+                  <a:srgbClr val="000000"/>
+                </a:solidFill>
+                <a:uFillTx/>
+                <a:latin typeface="Arial"/>
+              </a:rPr>
+              <a:t>Alta </a:t>
+            </a:r>
+            <a:r>
+              <a:rPr lang="en-US" b="0" u="none" strike="noStrike" dirty="0" err="1">
+                <a:solidFill>
+                  <a:srgbClr val="000000"/>
+                </a:solidFill>
+                <a:uFillTx/>
+                <a:latin typeface="Arial"/>
+              </a:rPr>
+              <a:t>sensibilidade</a:t>
+            </a:r>
+            <a:r>
+              <a:rPr lang="en-US" b="0" u="none" strike="noStrike" dirty="0">
+                <a:solidFill>
+                  <a:srgbClr val="000000"/>
+                </a:solidFill>
+                <a:uFillTx/>
+                <a:latin typeface="Arial"/>
+              </a:rPr>
+              <a:t> </a:t>
+            </a:r>
+            <a:r>
+              <a:rPr lang="en-US" b="0" u="none" strike="noStrike" dirty="0" err="1">
+                <a:solidFill>
+                  <a:srgbClr val="000000"/>
+                </a:solidFill>
+                <a:uFillTx/>
+                <a:latin typeface="Arial"/>
+              </a:rPr>
+              <a:t>térmica</a:t>
+            </a:r>
+            <a:r>
+              <a:rPr lang="en-US" b="0" u="none" strike="noStrike" dirty="0">
+                <a:solidFill>
+                  <a:srgbClr val="000000"/>
+                </a:solidFill>
+                <a:uFillTx/>
+                <a:latin typeface="Arial"/>
+              </a:rPr>
+              <a:t> – </a:t>
+            </a:r>
+            <a:r>
+              <a:rPr lang="en-US" b="0" u="none" strike="noStrike" dirty="0" err="1">
+                <a:solidFill>
+                  <a:srgbClr val="000000"/>
+                </a:solidFill>
+                <a:uFillTx/>
+                <a:latin typeface="Arial"/>
+              </a:rPr>
+              <a:t>aumento</a:t>
+            </a:r>
+            <a:r>
+              <a:rPr lang="en-US" b="0" u="none" strike="noStrike" dirty="0">
+                <a:solidFill>
+                  <a:srgbClr val="000000"/>
+                </a:solidFill>
+                <a:uFillTx/>
+                <a:latin typeface="Arial"/>
+              </a:rPr>
+              <a:t> </a:t>
+            </a:r>
+            <a:r>
+              <a:rPr lang="en-US" b="0" u="none" strike="noStrike" dirty="0" err="1">
+                <a:solidFill>
+                  <a:srgbClr val="000000"/>
+                </a:solidFill>
+                <a:uFillTx/>
+                <a:latin typeface="Arial"/>
+              </a:rPr>
+              <a:t>recuperação</a:t>
+            </a:r>
+            <a:r>
+              <a:rPr lang="en-US" b="0" u="none" strike="noStrike" dirty="0">
+                <a:solidFill>
+                  <a:srgbClr val="000000"/>
+                </a:solidFill>
+                <a:uFillTx/>
+                <a:latin typeface="Arial"/>
+              </a:rPr>
+              <a:t> de H2S</a:t>
+            </a:r>
+          </a:p>
+          <a:p>
+            <a:pPr marL="673200" lvl="1" indent="-216000">
+              <a:buClr>
+                <a:srgbClr val="000000"/>
+              </a:buClr>
+              <a:buSzPct val="45000"/>
+              <a:buFont typeface="Wingdings" charset="2"/>
+              <a:buChar char=""/>
+            </a:pPr>
+            <a:r>
+              <a:rPr lang="en-US" dirty="0">
+                <a:solidFill>
+                  <a:srgbClr val="000000"/>
+                </a:solidFill>
+                <a:latin typeface="Arial"/>
+              </a:rPr>
+              <a:t>Baixa </a:t>
+            </a:r>
+            <a:r>
+              <a:rPr lang="en-US" dirty="0" err="1">
+                <a:solidFill>
+                  <a:srgbClr val="000000"/>
+                </a:solidFill>
+                <a:latin typeface="Arial"/>
+              </a:rPr>
+              <a:t>sensibilidade</a:t>
+            </a:r>
+            <a:r>
+              <a:rPr lang="en-US" dirty="0">
+                <a:solidFill>
+                  <a:srgbClr val="000000"/>
+                </a:solidFill>
+                <a:latin typeface="Arial"/>
+              </a:rPr>
+              <a:t> </a:t>
+            </a:r>
+            <a:r>
+              <a:rPr lang="en-US" dirty="0" err="1">
+                <a:solidFill>
+                  <a:srgbClr val="000000"/>
+                </a:solidFill>
+                <a:latin typeface="Arial"/>
+              </a:rPr>
+              <a:t>térmica</a:t>
+            </a:r>
+            <a:r>
+              <a:rPr lang="en-US" dirty="0">
+                <a:solidFill>
+                  <a:srgbClr val="000000"/>
+                </a:solidFill>
+                <a:latin typeface="Arial"/>
+              </a:rPr>
+              <a:t> – </a:t>
+            </a:r>
+            <a:r>
+              <a:rPr lang="en-US" dirty="0" err="1">
+                <a:solidFill>
+                  <a:srgbClr val="000000"/>
+                </a:solidFill>
+                <a:latin typeface="Arial"/>
+              </a:rPr>
+              <a:t>após</a:t>
+            </a:r>
+            <a:r>
+              <a:rPr lang="en-US" dirty="0">
+                <a:solidFill>
+                  <a:srgbClr val="000000"/>
+                </a:solidFill>
+                <a:latin typeface="Arial"/>
+              </a:rPr>
+              <a:t> </a:t>
+            </a:r>
+            <a:r>
+              <a:rPr lang="en-US" dirty="0" err="1">
+                <a:solidFill>
+                  <a:srgbClr val="000000"/>
+                </a:solidFill>
+                <a:latin typeface="Arial"/>
+              </a:rPr>
+              <a:t>recuperação</a:t>
+            </a:r>
+            <a:r>
+              <a:rPr lang="en-US" dirty="0">
+                <a:solidFill>
+                  <a:srgbClr val="000000"/>
+                </a:solidFill>
+                <a:latin typeface="Arial"/>
+              </a:rPr>
+              <a:t> completa de H2S</a:t>
+            </a:r>
+          </a:p>
+          <a:p>
+            <a:pPr marL="216000" indent="-216000">
+              <a:buClr>
+                <a:srgbClr val="000000"/>
+              </a:buClr>
+              <a:buSzPct val="45000"/>
+              <a:buFont typeface="Wingdings" charset="2"/>
+              <a:buChar char=""/>
+            </a:pPr>
             <a:endParaRPr lang="en-US" b="0" u="none" strike="noStrike" dirty="0">
               <a:solidFill>
                 <a:srgbClr val="000000"/>
@@ -12264,33 +12445,40 @@
               <a:buChar char=""/>
             </a:pPr>
             <a:r>
-              <a:rPr lang="en-US" b="0" u="none" strike="noStrike" dirty="0" err="1">
-                <a:solidFill>
-                  <a:srgbClr val="000000"/>
-                </a:solidFill>
-                <a:uFillTx/>
-                <a:latin typeface="Arial"/>
-              </a:rPr>
-              <a:t>Vazão</a:t>
-            </a:r>
-            <a:r>
-              <a:rPr lang="en-US" b="0" u="none" strike="noStrike" dirty="0">
-                <a:solidFill>
-                  <a:srgbClr val="000000"/>
-                </a:solidFill>
-                <a:uFillTx/>
+              <a:rPr lang="en-US" dirty="0" err="1">
+                <a:solidFill>
+                  <a:srgbClr val="000000"/>
+                </a:solidFill>
+                <a:latin typeface="Arial"/>
+              </a:rPr>
+              <a:t>Ganho</a:t>
+            </a:r>
+            <a:r>
+              <a:rPr lang="en-US" dirty="0">
+                <a:solidFill>
+                  <a:srgbClr val="000000"/>
+                </a:solidFill>
                 <a:latin typeface="Arial"/>
               </a:rPr>
               <a:t> </a:t>
             </a:r>
             <a:r>
+              <a:rPr lang="en-US" dirty="0" err="1">
+                <a:solidFill>
+                  <a:srgbClr val="000000"/>
+                </a:solidFill>
+                <a:latin typeface="Arial"/>
+              </a:rPr>
+              <a:t>estático</a:t>
+            </a:r>
+            <a:r>
               <a:rPr lang="en-US" dirty="0">
                 <a:solidFill>
                   <a:srgbClr val="000000"/>
                 </a:solidFill>
                 <a:latin typeface="Arial"/>
               </a:rPr>
-              <a:t>e </a:t>
+              <a:t> entre carga </a:t>
             </a:r>
             <a:r>
               <a:rPr lang="en-US" dirty="0" err="1">
@@ -12299,7 +12487,7 @@
                 </a:solidFill>
                 <a:latin typeface="Arial"/>
               </a:rPr>
-              <a:t>Temperatura</a:t>
+              <a:t>térmica</a:t>
             </a:r>
             <a:r>
               <a:rPr lang="en-US" dirty="0">
@@ -12308,7 +12496,7 @@
                 </a:solidFill>
                 <a:latin typeface="Arial"/>
               </a:rPr>
-              <a:t> de </a:t>
+              <a:t> </a:t>
             </a:r>
             <a:r>
               <a:rPr lang="en-US" dirty="0" err="1">
@@ -12317,43 +12505,205 @@
                 </a:solidFill>
                 <a:latin typeface="Arial"/>
               </a:rPr>
+              <a:t>refervedor</a:t>
+            </a:r>
+            <a:r>
+              <a:rPr lang="en-US" dirty="0">
+                <a:solidFill>
+                  <a:srgbClr val="000000"/>
+                </a:solidFill>
+                <a:latin typeface="Arial"/>
+              </a:rPr>
+              <a:t> x temp. topo se </a:t>
+            </a:r>
+            <a:r>
+              <a:rPr lang="en-US" dirty="0" err="1">
+                <a:solidFill>
+                  <a:srgbClr val="000000"/>
+                </a:solidFill>
+                <a:latin typeface="Arial"/>
+              </a:rPr>
+              <a:t>mantém</a:t>
+            </a:r>
+            <a:r>
+              <a:rPr lang="en-US" dirty="0">
+                <a:solidFill>
+                  <a:srgbClr val="000000"/>
+                </a:solidFill>
+                <a:latin typeface="Arial"/>
+              </a:rPr>
+              <a:t> </a:t>
+            </a:r>
+            <a:r>
+              <a:rPr lang="en-US" dirty="0" err="1">
+                <a:solidFill>
+                  <a:srgbClr val="000000"/>
+                </a:solidFill>
+                <a:latin typeface="Arial"/>
+              </a:rPr>
+              <a:t>apesar</a:t>
+            </a:r>
+            <a:r>
+              <a:rPr lang="en-US" dirty="0">
+                <a:solidFill>
+                  <a:srgbClr val="000000"/>
+                </a:solidFill>
+                <a:latin typeface="Arial"/>
+              </a:rPr>
+              <a:t> dos </a:t>
+            </a:r>
+            <a:r>
+              <a:rPr lang="en-US" dirty="0" err="1">
+                <a:solidFill>
+                  <a:srgbClr val="000000"/>
+                </a:solidFill>
+                <a:latin typeface="Arial"/>
+              </a:rPr>
+              <a:t>deslocamento</a:t>
+            </a:r>
+            <a:r>
+              <a:rPr lang="en-US" dirty="0">
+                <a:solidFill>
+                  <a:srgbClr val="000000"/>
+                </a:solidFill>
+                <a:latin typeface="Arial"/>
+              </a:rPr>
+              <a:t> das curvas para </a:t>
+            </a:r>
+            <a:r>
+              <a:rPr lang="en-US" dirty="0" err="1">
+                <a:solidFill>
+                  <a:srgbClr val="000000"/>
+                </a:solidFill>
+                <a:latin typeface="Arial"/>
+              </a:rPr>
+              <a:t>os</a:t>
+            </a:r>
+            <a:r>
+              <a:rPr lang="en-US" dirty="0">
+                <a:solidFill>
+                  <a:srgbClr val="000000"/>
+                </a:solidFill>
+                <a:latin typeface="Arial"/>
+              </a:rPr>
+              <a:t> </a:t>
+            </a:r>
+            <a:r>
+              <a:rPr lang="en-US" dirty="0" err="1">
+                <a:solidFill>
+                  <a:srgbClr val="000000"/>
+                </a:solidFill>
+                <a:latin typeface="Arial"/>
+              </a:rPr>
+              <a:t>casos</a:t>
+            </a:r>
+            <a:r>
+              <a:rPr lang="en-US" dirty="0">
+                <a:solidFill>
+                  <a:srgbClr val="000000"/>
+                </a:solidFill>
+                <a:latin typeface="Arial"/>
+              </a:rPr>
+              <a:t> com </a:t>
+            </a:r>
+            <a:r>
+              <a:rPr lang="en-US" dirty="0" err="1">
+                <a:solidFill>
+                  <a:srgbClr val="000000"/>
+                </a:solidFill>
+                <a:latin typeface="Arial"/>
+              </a:rPr>
+              <a:t>mesma</a:t>
+            </a:r>
+            <a:r>
+              <a:rPr lang="en-US" dirty="0">
+                <a:solidFill>
+                  <a:srgbClr val="000000"/>
+                </a:solidFill>
+                <a:latin typeface="Arial"/>
+              </a:rPr>
+              <a:t> </a:t>
+            </a:r>
+            <a:r>
+              <a:rPr lang="en-US" dirty="0" err="1">
+                <a:solidFill>
+                  <a:srgbClr val="000000"/>
+                </a:solidFill>
+                <a:latin typeface="Arial"/>
+              </a:rPr>
+              <a:t>razão</a:t>
+            </a:r>
+            <a:r>
+              <a:rPr lang="en-US" dirty="0">
+                <a:solidFill>
+                  <a:srgbClr val="000000"/>
+                </a:solidFill>
+                <a:latin typeface="Arial"/>
+              </a:rPr>
+              <a:t> H2S/NH3, </a:t>
+            </a:r>
+            <a:r>
+              <a:rPr lang="en-US" dirty="0" err="1">
+                <a:solidFill>
+                  <a:srgbClr val="000000"/>
+                </a:solidFill>
+                <a:latin typeface="Arial"/>
+              </a:rPr>
+              <a:t>alteração</a:t>
+            </a:r>
+            <a:r>
+              <a:rPr lang="en-US" dirty="0">
+                <a:solidFill>
+                  <a:srgbClr val="000000"/>
+                </a:solidFill>
+                <a:latin typeface="Arial"/>
+              </a:rPr>
+              <a:t> da </a:t>
+            </a:r>
+            <a:r>
+              <a:rPr lang="en-US" dirty="0" err="1">
+                <a:solidFill>
+                  <a:srgbClr val="000000"/>
+                </a:solidFill>
+                <a:latin typeface="Arial"/>
+              </a:rPr>
+              <a:t>vazão</a:t>
+            </a:r>
+            <a:r>
+              <a:rPr lang="en-US" dirty="0">
+                <a:solidFill>
+                  <a:srgbClr val="000000"/>
+                </a:solidFill>
+                <a:latin typeface="Arial"/>
+              </a:rPr>
+              <a:t> e </a:t>
+            </a:r>
+            <a:r>
+              <a:rPr lang="en-US" dirty="0" err="1">
+                <a:solidFill>
+                  <a:srgbClr val="000000"/>
+                </a:solidFill>
+                <a:latin typeface="Arial"/>
+              </a:rPr>
+              <a:t>temperatura</a:t>
+            </a:r>
+            <a:r>
+              <a:rPr lang="en-US" dirty="0">
+                <a:solidFill>
+                  <a:srgbClr val="000000"/>
+                </a:solidFill>
+                <a:latin typeface="Arial"/>
+              </a:rPr>
+              <a:t> da </a:t>
+            </a:r>
+            <a:r>
+              <a:rPr lang="en-US" dirty="0" err="1">
+                <a:solidFill>
+                  <a:srgbClr val="000000"/>
+                </a:solidFill>
+                <a:latin typeface="Arial"/>
+              </a:rPr>
               <a:t>alimentação</a:t>
-            </a:r>
-            <a:r>
-              <a:rPr lang="en-US" dirty="0">
-                <a:solidFill>
-                  <a:srgbClr val="000000"/>
-                </a:solidFill>
-                <a:latin typeface="Arial"/>
-              </a:rPr>
-              <a:t> </a:t>
-            </a:r>
-            <a:r>
-              <a:rPr lang="en-US" dirty="0" err="1">
-                <a:solidFill>
-                  <a:srgbClr val="000000"/>
-                </a:solidFill>
-                <a:latin typeface="Arial"/>
-              </a:rPr>
-              <a:t>deslocam</a:t>
-            </a:r>
-            <a:r>
-              <a:rPr lang="en-US" dirty="0">
-                <a:solidFill>
-                  <a:srgbClr val="000000"/>
-                </a:solidFill>
-                <a:latin typeface="Arial"/>
-              </a:rPr>
-              <a:t> as curvas de </a:t>
-            </a:r>
-            <a:r>
-              <a:rPr lang="en-US" dirty="0" err="1">
-                <a:solidFill>
-                  <a:srgbClr val="000000"/>
-                </a:solidFill>
-                <a:latin typeface="Arial"/>
-              </a:rPr>
-              <a:t>operação</a:t>
             </a:r>
             <a:endParaRPr lang="en-US" b="0" u="none" strike="noStrike" dirty="0">
               <a:solidFill>
@@ -13367,6 +13717,16 @@
               <a:t>perda</a:t>
             </a:r>
             <a:r>
+              <a:rPr lang="en-US" dirty="0">
+                <a:solidFill>
+                  <a:srgbClr val="000000"/>
+                </a:solidFill>
+                <a:latin typeface="Arial"/>
+                <a:ea typeface="Microsoft YaHei"/>
+              </a:rPr>
+              <a:t> </a:t>
+            </a:r>
+            <a:r>
               <a:rPr lang="en-US">
                 <a:solidFill>
                   <a:srgbClr val="000000"/>
@@ -13374,15 +13734,18 @@
                 <a:latin typeface="Arial"/>
                 <a:ea typeface="Microsoft YaHei"/>
               </a:rPr>
-              <a:t> minima de NH3</a:t>
-            </a:r>
-            <a:endParaRPr lang="en-US" dirty="0">
-              <a:solidFill>
-                <a:srgbClr val="000000"/>
-              </a:solidFill>
-              <a:latin typeface="Arial"/>
-              <a:ea typeface="Microsoft YaHei"/>
-            </a:endParaRPr>
+              <a:t>mínima</a:t>
+            </a:r>
+            <a:r>
+              <a:rPr lang="en-US" dirty="0">
+                <a:solidFill>
+                  <a:srgbClr val="000000"/>
+                </a:solidFill>
+                <a:latin typeface="Arial"/>
+                <a:ea typeface="Microsoft YaHei"/>
+              </a:rPr>
+              <a:t> de NH3</a:t>
+            </a:r>
           </a:p>
           <a:p>
             <a:pPr marL="673200" lvl="1" indent="-216000">
@@ -13752,8 +14115,8 @@
         </p:blipFill>
         <p:spPr>
           <a:xfrm>
-            <a:off x="504000" y="2835275"/>
-            <a:ext cx="8423245" cy="1935508"/>
+            <a:off x="753465" y="2624826"/>
+            <a:ext cx="7683661" cy="1765565"/>
           </a:xfrm>
           <a:prstGeom prst="rect">
             <a:avLst/>
@@ -14058,8 +14421,8 @@
         </p:blipFill>
         <p:spPr>
           <a:xfrm>
-            <a:off x="760606" y="2153542"/>
-            <a:ext cx="3863005" cy="2391954"/>
+            <a:off x="1336632" y="2043814"/>
+            <a:ext cx="3206512" cy="1985457"/>
           </a:xfrm>
           <a:prstGeom prst="rect">
             <a:avLst/>
@@ -14088,8 +14451,8 @@
         </p:blipFill>
         <p:spPr>
           <a:xfrm>
-            <a:off x="5602787" y="2153542"/>
-            <a:ext cx="3206512" cy="2391954"/>
+            <a:off x="5537482" y="2131597"/>
+            <a:ext cx="2408504" cy="1796666"/>
           </a:xfrm>
           <a:prstGeom prst="rect">
             <a:avLst/>
@@ -14417,22 +14780,6 @@
               <a:buFont typeface="Arial" panose="020B0604020202020204" pitchFamily="34" charset="0"/>
               <a:buChar char="•"/>
             </a:pPr>
-            <a:endParaRPr lang="pt-BR" dirty="0">
-              <a:solidFill>
-                <a:srgbClr val="000000"/>
-              </a:solidFill>
-              <a:latin typeface="Arial"/>
-              <a:ea typeface="Microsoft YaHei"/>
-            </a:endParaRPr>
-          </a:p>
-          <a:p>
-            <a:pPr marL="285750" indent="-285750">
-              <a:lnSpc>
-                <a:spcPct val="100000"/>
-              </a:lnSpc>
-              <a:buFont typeface="Arial" panose="020B0604020202020204" pitchFamily="34" charset="0"/>
-              <a:buChar char="•"/>
-            </a:pPr>
             <a:r>
               <a:rPr lang="pt-BR" dirty="0">
                 <a:solidFill>
@@ -14443,22 +14790,6 @@
               </a:rPr>
               <a:t>Adequação ao presente trabalho:</a:t>
             </a:r>
-          </a:p>
-          <a:p>
-            <a:pPr marL="285750" indent="-285750">
-              <a:lnSpc>
-                <a:spcPct val="100000"/>
-              </a:lnSpc>
-              <a:buFont typeface="Arial" panose="020B0604020202020204" pitchFamily="34" charset="0"/>
-              <a:buChar char="•"/>
-            </a:pPr>
-            <a:endParaRPr lang="pt-BR" dirty="0">
-              <a:solidFill>
-                <a:srgbClr val="000000"/>
-              </a:solidFill>
-              <a:latin typeface="Arial"/>
-              <a:ea typeface="Microsoft YaHei"/>
-            </a:endParaRPr>
           </a:p>
           <a:p>
             <a:pPr marL="285750" indent="-285750">
@@ -14546,8 +14877,8 @@
         </p:blipFill>
         <p:spPr>
           <a:xfrm>
-            <a:off x="656497" y="1595407"/>
-            <a:ext cx="5895831" cy="2044951"/>
+            <a:off x="570586" y="1697820"/>
+            <a:ext cx="4641190" cy="1609783"/>
           </a:xfrm>
           <a:prstGeom prst="rect">
             <a:avLst/>
@@ -14576,7 +14907,7 @@
         </p:blipFill>
         <p:spPr>
           <a:xfrm>
-            <a:off x="656497" y="4075143"/>
+            <a:off x="504000" y="3884948"/>
             <a:ext cx="8918783" cy="1435207"/>
           </a:xfrm>
           <a:prstGeom prst="rect">
@@ -14688,8 +15019,8 @@
         </p:nvSpPr>
         <p:spPr>
           <a:xfrm>
-            <a:off x="158760" y="779040"/>
-            <a:ext cx="4816440" cy="4732920"/>
+            <a:off x="158759" y="779040"/>
+            <a:ext cx="8114731" cy="4732920"/>
           </a:xfrm>
           <a:prstGeom prst="rect">
             <a:avLst/>
@@ -14767,6 +15098,7 @@
               </a:solidFill>
               <a:uFillTx/>
               <a:latin typeface="Arial"/>
+              <a:ea typeface="Microsoft YaHei"/>
             </a:endParaRPr>
           </a:p>
           <a:p>
@@ -14774,6 +15106,68 @@
               <a:lnSpc>
                 <a:spcPct val="100000"/>
               </a:lnSpc>
+              <a:buClr>
+                <a:srgbClr val="000000"/>
+              </a:buClr>
+              <a:buSzPct val="45000"/>
+            </a:pPr>
+            <a:endParaRPr lang="en-US" sz="1800" b="0" u="none" strike="noStrike" dirty="0">
+              <a:solidFill>
+                <a:srgbClr val="000000"/>
+              </a:solidFill>
+              <a:uFillTx/>
+              <a:latin typeface="Arial"/>
+              <a:ea typeface="Microsoft YaHei"/>
+            </a:endParaRPr>
+          </a:p>
+          <a:p>
+            <a:pPr>
+              <a:lnSpc>
+                <a:spcPct val="100000"/>
+              </a:lnSpc>
+              <a:buClr>
+                <a:srgbClr val="000000"/>
+              </a:buClr>
+              <a:buSzPct val="45000"/>
+            </a:pPr>
+            <a:endParaRPr lang="en-US" sz="1800" b="0" u="none" strike="noStrike" dirty="0">
+              <a:solidFill>
+                <a:srgbClr val="000000"/>
+              </a:solidFill>
+              <a:uFillTx/>
+              <a:latin typeface="Arial"/>
+              <a:ea typeface="Microsoft YaHei"/>
+            </a:endParaRPr>
+          </a:p>
+          <a:p>
+            <a:pPr marL="342900" indent="-342900">
+              <a:lnSpc>
+                <a:spcPct val="100000"/>
+              </a:lnSpc>
+              <a:buClr>
+                <a:srgbClr val="000000"/>
+              </a:buClr>
+              <a:buSzPct val="45000"/>
+              <a:buAutoNum type="arabicPeriod"/>
+            </a:pPr>
+            <a:endParaRPr lang="en-US" sz="1800" b="0" u="none" strike="noStrike" dirty="0">
+              <a:solidFill>
+                <a:srgbClr val="000000"/>
+              </a:solidFill>
+              <a:uFillTx/>
+              <a:latin typeface="Arial"/>
+              <a:ea typeface="Microsoft YaHei"/>
+            </a:endParaRPr>
+          </a:p>
+          <a:p>
+            <a:pPr>
+              <a:lnSpc>
+                <a:spcPct val="100000"/>
+              </a:lnSpc>
+              <a:buClr>
+                <a:srgbClr val="000000"/>
+              </a:buClr>
+              <a:buSzPct val="45000"/>
             </a:pPr>
             <a:endParaRPr lang="en-US" sz="1800" b="0" u="none" strike="noStrike" dirty="0">
               <a:solidFill>
@@ -14797,38 +15191,372 @@
               <a:latin typeface="Arial"/>
             </a:endParaRPr>
           </a:p>
+          <a:p>
+            <a:pPr>
+              <a:lnSpc>
+                <a:spcPct val="100000"/>
+              </a:lnSpc>
+            </a:pPr>
+            <a:endParaRPr lang="en-US" sz="1800" b="0" u="none" strike="noStrike" dirty="0">
+              <a:solidFill>
+                <a:srgbClr val="000000"/>
+              </a:solidFill>
+              <a:uFillTx/>
+              <a:latin typeface="Arial"/>
+            </a:endParaRPr>
+          </a:p>
         </p:txBody>
       </p:sp>
-      <p:pic>
-        <p:nvPicPr>
-          <p:cNvPr id="3" name="Picture 2">
+      <p:sp>
+        <p:nvSpPr>
+          <p:cNvPr id="4" name="TextBox 3">
             <a:extLst>
               <a:ext uri="{FF2B5EF4-FFF2-40B4-BE49-F238E27FC236}">
-                <a16:creationId xmlns:a16="http://schemas.microsoft.com/office/drawing/2014/main" id="{E9710F73-84F8-8579-171C-83D90FA51AC0}"/>
+                <a16:creationId xmlns:a16="http://schemas.microsoft.com/office/drawing/2014/main" id="{FBCDEE37-55AE-1974-ACD1-CCEE635A2DFC}"/>
               </a:ext>
             </a:extLst>
           </p:cNvPr>
-          <p:cNvPicPr>
-            <a:picLocks noChangeAspect="1"/>
-          </p:cNvPicPr>
+          <p:cNvSpPr txBox="1"/>
           <p:nvPr/>
-        </p:nvPicPr>
-        <p:blipFill>
-          <a:blip r:embed="rId2"/>
-          <a:stretch>
-            <a:fillRect/>
-          </a:stretch>
-        </p:blipFill>
+        </p:nvSpPr>
         <p:spPr>
           <a:xfrm>
-            <a:off x="825557" y="1585758"/>
-            <a:ext cx="5552173" cy="1634519"/>
+            <a:off x="568755" y="1528204"/>
+            <a:ext cx="6270955" cy="1524007"/>
           </a:xfrm>
           <a:prstGeom prst="rect">
             <a:avLst/>
           </a:prstGeom>
+          <a:noFill/>
         </p:spPr>
-      </p:pic>
+        <p:txBody>
+          <a:bodyPr wrap="square">
+            <a:spAutoFit/>
+          </a:bodyPr>
+          <a:lstStyle/>
+          <a:p>
+            <a:pPr>
+              <a:lnSpc>
+                <a:spcPct val="150000"/>
+              </a:lnSpc>
+              <a:buClr>
+                <a:srgbClr val="000000"/>
+              </a:buClr>
+              <a:buSzPct val="45000"/>
+            </a:pPr>
+            <a:r>
+              <a:rPr lang="en-US" sz="1600" b="0" u="none" strike="noStrike" dirty="0">
+                <a:solidFill>
+                  <a:srgbClr val="000000"/>
+                </a:solidFill>
+                <a:uFillTx/>
+                <a:latin typeface="Arial"/>
+                <a:ea typeface="Microsoft YaHei"/>
+              </a:rPr>
+              <a:t>1. </a:t>
+            </a:r>
+            <a:r>
+              <a:rPr lang="en-US" sz="1600" b="0" u="none" strike="noStrike" dirty="0" err="1">
+                <a:solidFill>
+                  <a:srgbClr val="000000"/>
+                </a:solidFill>
+                <a:uFillTx/>
+                <a:latin typeface="Arial"/>
+                <a:ea typeface="Microsoft YaHei"/>
+              </a:rPr>
+              <a:t>Desenvolvimento</a:t>
+            </a:r>
+            <a:r>
+              <a:rPr lang="en-US" sz="1600" b="0" u="none" strike="noStrike" dirty="0">
+                <a:solidFill>
+                  <a:srgbClr val="000000"/>
+                </a:solidFill>
+                <a:uFillTx/>
+                <a:latin typeface="Arial"/>
+                <a:ea typeface="Microsoft YaHei"/>
+              </a:rPr>
+              <a:t> do </a:t>
+            </a:r>
+            <a:r>
+              <a:rPr lang="en-US" sz="1600" b="0" u="none" strike="noStrike" dirty="0" err="1">
+                <a:solidFill>
+                  <a:srgbClr val="000000"/>
+                </a:solidFill>
+                <a:uFillTx/>
+                <a:latin typeface="Arial"/>
+                <a:ea typeface="Microsoft YaHei"/>
+              </a:rPr>
+              <a:t>modelo</a:t>
+            </a:r>
+            <a:r>
+              <a:rPr lang="en-US" sz="1600" b="0" u="none" strike="noStrike" dirty="0">
+                <a:solidFill>
+                  <a:srgbClr val="000000"/>
+                </a:solidFill>
+                <a:uFillTx/>
+                <a:latin typeface="Arial"/>
+                <a:ea typeface="Microsoft YaHei"/>
+              </a:rPr>
+              <a:t> </a:t>
+            </a:r>
+            <a:r>
+              <a:rPr lang="en-US" sz="1600" b="0" u="none" strike="noStrike" dirty="0" err="1">
+                <a:solidFill>
+                  <a:srgbClr val="000000"/>
+                </a:solidFill>
+                <a:uFillTx/>
+                <a:latin typeface="Arial"/>
+                <a:ea typeface="Microsoft YaHei"/>
+              </a:rPr>
+              <a:t>estático</a:t>
+            </a:r>
+            <a:r>
+              <a:rPr lang="en-US" sz="1600" b="0" u="none" strike="noStrike" dirty="0">
+                <a:solidFill>
+                  <a:srgbClr val="000000"/>
+                </a:solidFill>
+                <a:uFillTx/>
+                <a:latin typeface="Arial"/>
+                <a:ea typeface="Microsoft YaHei"/>
+              </a:rPr>
+              <a:t> </a:t>
+            </a:r>
+            <a:r>
+              <a:rPr lang="en-US" sz="1600" b="0" u="none" strike="noStrike" dirty="0" err="1">
+                <a:solidFill>
+                  <a:srgbClr val="000000"/>
+                </a:solidFill>
+                <a:uFillTx/>
+                <a:latin typeface="Arial"/>
+                <a:ea typeface="Microsoft YaHei"/>
+              </a:rPr>
+              <a:t>em</a:t>
+            </a:r>
+            <a:r>
+              <a:rPr lang="en-US" sz="1600" b="0" u="none" strike="noStrike" dirty="0">
+                <a:solidFill>
+                  <a:srgbClr val="000000"/>
+                </a:solidFill>
+                <a:uFillTx/>
+                <a:latin typeface="Arial"/>
+                <a:ea typeface="Microsoft YaHei"/>
+              </a:rPr>
+              <a:t> Aspen Plus V14</a:t>
+            </a:r>
+          </a:p>
+          <a:p>
+            <a:pPr>
+              <a:lnSpc>
+                <a:spcPct val="150000"/>
+              </a:lnSpc>
+              <a:buClr>
+                <a:srgbClr val="000000"/>
+              </a:buClr>
+              <a:buSzPct val="45000"/>
+            </a:pPr>
+            <a:r>
+              <a:rPr lang="en-US" sz="1600" b="0" u="none" strike="noStrike" dirty="0">
+                <a:solidFill>
+                  <a:srgbClr val="000000"/>
+                </a:solidFill>
+                <a:uFillTx/>
+                <a:latin typeface="Arial"/>
+                <a:ea typeface="Microsoft YaHei"/>
+              </a:rPr>
+              <a:t>2. </a:t>
+            </a:r>
+            <a:r>
+              <a:rPr lang="en-US" sz="1600" b="0" u="none" strike="noStrike" dirty="0" err="1">
+                <a:solidFill>
+                  <a:srgbClr val="000000"/>
+                </a:solidFill>
+                <a:uFillTx/>
+                <a:latin typeface="Arial"/>
+                <a:ea typeface="Microsoft YaHei"/>
+              </a:rPr>
+              <a:t>Análise</a:t>
+            </a:r>
+            <a:r>
+              <a:rPr lang="en-US" sz="1600" b="0" u="none" strike="noStrike" dirty="0">
+                <a:solidFill>
+                  <a:srgbClr val="000000"/>
+                </a:solidFill>
+                <a:uFillTx/>
+                <a:latin typeface="Arial"/>
+                <a:ea typeface="Microsoft YaHei"/>
+              </a:rPr>
+              <a:t> de </a:t>
+            </a:r>
+            <a:r>
+              <a:rPr lang="en-US" sz="1600" b="0" u="none" strike="noStrike" dirty="0" err="1">
+                <a:solidFill>
+                  <a:srgbClr val="000000"/>
+                </a:solidFill>
+                <a:uFillTx/>
+                <a:latin typeface="Arial"/>
+                <a:ea typeface="Microsoft YaHei"/>
+              </a:rPr>
+              <a:t>Sensibilidade</a:t>
+            </a:r>
+            <a:endParaRPr lang="en-US" sz="1600" b="0" u="none" strike="noStrike" dirty="0">
+              <a:solidFill>
+                <a:srgbClr val="000000"/>
+              </a:solidFill>
+              <a:uFillTx/>
+              <a:latin typeface="Arial"/>
+              <a:ea typeface="Microsoft YaHei"/>
+            </a:endParaRPr>
+          </a:p>
+          <a:p>
+            <a:pPr>
+              <a:lnSpc>
+                <a:spcPct val="150000"/>
+              </a:lnSpc>
+              <a:buClr>
+                <a:srgbClr val="000000"/>
+              </a:buClr>
+              <a:buSzPct val="45000"/>
+            </a:pPr>
+            <a:r>
+              <a:rPr lang="en-US" sz="1600" dirty="0">
+                <a:solidFill>
+                  <a:srgbClr val="000000"/>
+                </a:solidFill>
+                <a:latin typeface="Arial"/>
+                <a:ea typeface="Microsoft YaHei"/>
+              </a:rPr>
+              <a:t>3. </a:t>
+            </a:r>
+            <a:r>
+              <a:rPr lang="en-US" sz="1600" dirty="0" err="1">
+                <a:solidFill>
+                  <a:srgbClr val="000000"/>
+                </a:solidFill>
+                <a:latin typeface="Arial"/>
+                <a:ea typeface="Microsoft YaHei"/>
+              </a:rPr>
+              <a:t>Exportação</a:t>
+            </a:r>
+            <a:r>
+              <a:rPr lang="en-US" sz="1600" dirty="0">
+                <a:solidFill>
+                  <a:srgbClr val="000000"/>
+                </a:solidFill>
+                <a:latin typeface="Arial"/>
+                <a:ea typeface="Microsoft YaHei"/>
+              </a:rPr>
+              <a:t> dos dados</a:t>
+            </a:r>
+          </a:p>
+          <a:p>
+            <a:pPr>
+              <a:lnSpc>
+                <a:spcPct val="150000"/>
+              </a:lnSpc>
+              <a:buClr>
+                <a:srgbClr val="000000"/>
+              </a:buClr>
+              <a:buSzPct val="45000"/>
+            </a:pPr>
+            <a:r>
+              <a:rPr lang="en-US" sz="1600" b="0" u="none" strike="noStrike" dirty="0">
+                <a:solidFill>
+                  <a:srgbClr val="000000"/>
+                </a:solidFill>
+                <a:uFillTx/>
+                <a:latin typeface="Arial"/>
+                <a:ea typeface="Microsoft YaHei"/>
+              </a:rPr>
+              <a:t>4. </a:t>
+            </a:r>
+            <a:r>
+              <a:rPr lang="en-US" sz="1600" b="0" u="none" strike="noStrike" dirty="0" err="1">
+                <a:solidFill>
+                  <a:srgbClr val="000000"/>
+                </a:solidFill>
+                <a:uFillTx/>
+                <a:latin typeface="Arial"/>
+                <a:ea typeface="Microsoft YaHei"/>
+              </a:rPr>
+              <a:t>Análise</a:t>
+            </a:r>
+            <a:r>
+              <a:rPr lang="en-US" sz="1600" b="0" u="none" strike="noStrike" dirty="0">
+                <a:solidFill>
+                  <a:srgbClr val="000000"/>
+                </a:solidFill>
+                <a:uFillTx/>
+                <a:latin typeface="Arial"/>
+                <a:ea typeface="Microsoft YaHei"/>
+              </a:rPr>
+              <a:t> e </a:t>
+            </a:r>
+            <a:r>
+              <a:rPr lang="en-US" sz="1600" b="0" u="none" strike="noStrike" dirty="0" err="1">
+                <a:solidFill>
+                  <a:srgbClr val="000000"/>
+                </a:solidFill>
+                <a:uFillTx/>
+                <a:latin typeface="Arial"/>
+                <a:ea typeface="Microsoft YaHei"/>
+              </a:rPr>
+              <a:t>interpretação</a:t>
+            </a:r>
+            <a:r>
+              <a:rPr lang="en-US" sz="1600" b="0" u="none" strike="noStrike" dirty="0">
+                <a:solidFill>
+                  <a:srgbClr val="000000"/>
+                </a:solidFill>
+                <a:uFillTx/>
+                <a:latin typeface="Arial"/>
+                <a:ea typeface="Microsoft YaHei"/>
+              </a:rPr>
+              <a:t> dos </a:t>
+            </a:r>
+            <a:r>
+              <a:rPr lang="en-US" sz="1600" b="0" u="none" strike="noStrike" dirty="0" err="1">
+                <a:solidFill>
+                  <a:srgbClr val="000000"/>
+                </a:solidFill>
+                <a:uFillTx/>
+                <a:latin typeface="Arial"/>
+                <a:ea typeface="Microsoft YaHei"/>
+              </a:rPr>
+              <a:t>resultados</a:t>
+            </a:r>
+            <a:r>
+              <a:rPr lang="en-US" sz="1600" b="0" u="none" strike="noStrike" dirty="0">
+                <a:solidFill>
+                  <a:srgbClr val="000000"/>
+                </a:solidFill>
+                <a:uFillTx/>
+                <a:latin typeface="Arial"/>
+                <a:ea typeface="Microsoft YaHei"/>
+              </a:rPr>
+              <a:t> </a:t>
+            </a:r>
+            <a:r>
+              <a:rPr lang="en-US" sz="1600" b="0" u="none" strike="noStrike" dirty="0" err="1">
+                <a:solidFill>
+                  <a:srgbClr val="000000"/>
+                </a:solidFill>
+                <a:uFillTx/>
+                <a:latin typeface="Arial"/>
+                <a:ea typeface="Microsoft YaHei"/>
+              </a:rPr>
+              <a:t>obtidos</a:t>
+            </a:r>
+            <a:endParaRPr lang="en-US" sz="1600" b="0" u="none" strike="noStrike" dirty="0">
+              <a:solidFill>
+                <a:srgbClr val="000000"/>
+              </a:solidFill>
+              <a:uFillTx/>
+              <a:latin typeface="Arial"/>
+              <a:ea typeface="Microsoft YaHei"/>
+            </a:endParaRPr>
+          </a:p>
+        </p:txBody>
+      </p:sp>
     </p:spTree>
   </p:cSld>
   <p:clrMapOvr>
@@ -15103,7 +15831,7 @@
         </p:blipFill>
         <p:spPr>
           <a:xfrm>
-            <a:off x="158760" y="1755278"/>
+            <a:off x="1190203" y="1828430"/>
             <a:ext cx="7354326" cy="2953162"/>
           </a:xfrm>
           <a:prstGeom prst="rect">
@@ -15111,6 +15839,53 @@
           </a:prstGeom>
         </p:spPr>
       </p:pic>
+      <p:cxnSp>
+        <p:nvCxnSpPr>
+          <p:cNvPr id="2" name="Straight Connector 1">
+            <a:extLst>
+              <a:ext uri="{FF2B5EF4-FFF2-40B4-BE49-F238E27FC236}">
+                <a16:creationId xmlns:a16="http://schemas.microsoft.com/office/drawing/2014/main" id="{6D2FC122-4CB1-A5D6-B2F3-72C2F176F899}"/>
+              </a:ext>
+            </a:extLst>
+          </p:cNvPr>
+          <p:cNvCxnSpPr>
+            <a:cxnSpLocks/>
+          </p:cNvCxnSpPr>
+          <p:nvPr/>
+        </p:nvCxnSpPr>
+        <p:spPr>
+          <a:xfrm>
+            <a:off x="1550821" y="3213547"/>
+            <a:ext cx="980238" cy="0"/>
+          </a:xfrm>
+          <a:prstGeom prst="line">
+            <a:avLst/>
+          </a:prstGeom>
+          <a:ln w="19050" cap="flat" cmpd="sng" algn="ctr">
+            <a:solidFill>
+              <a:srgbClr val="FF0000"/>
+            </a:solidFill>
+            <a:prstDash val="solid"/>
+            <a:round/>
+            <a:headEnd type="none" w="med" len="med"/>
+            <a:tailEnd type="none" w="med" len="med"/>
+          </a:ln>
+        </p:spPr>
+        <p:style>
+          <a:lnRef idx="0">
+            <a:scrgbClr r="0" g="0" b="0"/>
+          </a:lnRef>
+          <a:fillRef idx="0">
+            <a:scrgbClr r="0" g="0" b="0"/>
+          </a:fillRef>
+          <a:effectRef idx="0">
+            <a:scrgbClr r="0" g="0" b="0"/>
+          </a:effectRef>
+          <a:fontRef idx="minor">
+            <a:schemeClr val="tx1"/>
+          </a:fontRef>
+        </p:style>
+      </p:cxnSp>
     </p:spTree>
     <p:extLst>
       <p:ext uri="{BB962C8B-B14F-4D97-AF65-F5344CB8AC3E}">
@@ -15390,7 +16165,7 @@
         </p:blipFill>
         <p:spPr>
           <a:xfrm>
-            <a:off x="268815" y="1907374"/>
+            <a:off x="378870" y="1907374"/>
             <a:ext cx="9431130" cy="1855802"/>
           </a:xfrm>
           <a:prstGeom prst="rect">
@@ -15398,6 +16173,100 @@
           </a:prstGeom>
         </p:spPr>
       </p:pic>
+      <p:cxnSp>
+        <p:nvCxnSpPr>
+          <p:cNvPr id="3" name="Straight Connector 2">
+            <a:extLst>
+              <a:ext uri="{FF2B5EF4-FFF2-40B4-BE49-F238E27FC236}">
+                <a16:creationId xmlns:a16="http://schemas.microsoft.com/office/drawing/2014/main" id="{5AFD4B4F-596C-789F-846A-C628CCCD84C7}"/>
+              </a:ext>
+            </a:extLst>
+          </p:cNvPr>
+          <p:cNvCxnSpPr>
+            <a:cxnSpLocks/>
+          </p:cNvCxnSpPr>
+          <p:nvPr/>
+        </p:nvCxnSpPr>
+        <p:spPr>
+          <a:xfrm>
+            <a:off x="3511295" y="3732926"/>
+            <a:ext cx="475488" cy="0"/>
+          </a:xfrm>
+          <a:prstGeom prst="line">
+            <a:avLst/>
+          </a:prstGeom>
+          <a:ln w="19050" cap="flat" cmpd="sng" algn="ctr">
+            <a:solidFill>
+              <a:srgbClr val="FF0000"/>
+            </a:solidFill>
+            <a:prstDash val="solid"/>
+            <a:round/>
+            <a:headEnd type="none" w="med" len="med"/>
+            <a:tailEnd type="none" w="med" len="med"/>
+          </a:ln>
+        </p:spPr>
+        <p:style>
+          <a:lnRef idx="0">
+            <a:scrgbClr r="0" g="0" b="0"/>
+          </a:lnRef>
+          <a:fillRef idx="0">
+            <a:scrgbClr r="0" g="0" b="0"/>
+          </a:fillRef>
+          <a:effectRef idx="0">
+            <a:scrgbClr r="0" g="0" b="0"/>
+          </a:effectRef>
+          <a:fontRef idx="minor">
+            <a:schemeClr val="tx1"/>
+          </a:fontRef>
+        </p:style>
+      </p:cxnSp>
+      <p:cxnSp>
+        <p:nvCxnSpPr>
+          <p:cNvPr id="7" name="Straight Connector 6">
+            <a:extLst>
+              <a:ext uri="{FF2B5EF4-FFF2-40B4-BE49-F238E27FC236}">
+                <a16:creationId xmlns:a16="http://schemas.microsoft.com/office/drawing/2014/main" id="{D24C94D7-8FB4-02D9-B503-E88525746D83}"/>
+              </a:ext>
+            </a:extLst>
+          </p:cNvPr>
+          <p:cNvCxnSpPr>
+            <a:cxnSpLocks/>
+          </p:cNvCxnSpPr>
+          <p:nvPr/>
+        </p:nvCxnSpPr>
+        <p:spPr>
+          <a:xfrm>
+            <a:off x="1330146" y="2195515"/>
+            <a:ext cx="564491" cy="0"/>
+          </a:xfrm>
+          <a:prstGeom prst="line">
+            <a:avLst/>
+          </a:prstGeom>
+          <a:ln w="19050" cap="flat" cmpd="sng" algn="ctr">
+            <a:solidFill>
+              <a:srgbClr val="FF0000"/>
+            </a:solidFill>
+            <a:prstDash val="solid"/>
+            <a:round/>
+            <a:headEnd type="none" w="med" len="med"/>
+            <a:tailEnd type="none" w="med" len="med"/>
+          </a:ln>
+        </p:spPr>
+        <p:style>
+          <a:lnRef idx="0">
+            <a:scrgbClr r="0" g="0" b="0"/>
+          </a:lnRef>
+          <a:fillRef idx="0">
+            <a:scrgbClr r="0" g="0" b="0"/>
+          </a:fillRef>
+          <a:effectRef idx="0">
+            <a:scrgbClr r="0" g="0" b="0"/>
+          </a:effectRef>
+          <a:fontRef idx="minor">
+            <a:schemeClr val="tx1"/>
+          </a:fontRef>
+        </p:style>
+      </p:cxnSp>
     </p:spTree>
     <p:extLst>
       <p:ext uri="{BB962C8B-B14F-4D97-AF65-F5344CB8AC3E}">

--- a/trabalho final/Apresentação Francisco Davi rev0.pptx
+++ b/trabalho final/Apresentação Francisco Davi rev0.pptx
@@ -14907,8 +14907,8 @@
         </p:blipFill>
         <p:spPr>
           <a:xfrm>
-            <a:off x="504000" y="3884948"/>
-            <a:ext cx="8918783" cy="1435207"/>
+            <a:off x="504000" y="3852108"/>
+            <a:ext cx="8486437" cy="1365634"/>
           </a:xfrm>
           <a:prstGeom prst="rect">
             <a:avLst/>
